--- a/docs/decks/RA-Skills-Showcase.pptx
+++ b/docs/decks/RA-Skills-Showcase.pptx
@@ -3937,7 +3937,7 @@
           <a:p>
             <a:r>
               <a:rPr lang="en-US" dirty="0"/>
-              <a:t>This is what RA Skills covers, including various research country group catalogs and more than 150 non-vintage dataset, align with current </a:t>
+              <a:t>This is what RA Skills covers, including various research country group catalogs and more than 150 non-vintage datasets, align with current </a:t>
             </a:r>
             <a:r>
               <a:rPr lang="en-US" dirty="0" err="1"/>
@@ -4332,7 +4332,7 @@
           <a:p>
             <a:fld id="{5BCAD085-E8A6-8845-BD4E-CB4CCA059FC4}" type="datetimeFigureOut">
               <a:rPr lang="en-US" smtClean="0"/>
-              <a:t>6/11/2026</a:t>
+              <a:t>6/12/2026</a:t>
             </a:fld>
             <a:endParaRPr lang="en-US"/>
           </a:p>
@@ -4500,7 +4500,7 @@
           <a:p>
             <a:fld id="{5BCAD085-E8A6-8845-BD4E-CB4CCA059FC4}" type="datetimeFigureOut">
               <a:rPr lang="en-US" smtClean="0"/>
-              <a:t>6/11/2026</a:t>
+              <a:t>6/12/2026</a:t>
             </a:fld>
             <a:endParaRPr lang="en-US"/>
           </a:p>
@@ -4678,7 +4678,7 @@
           <a:p>
             <a:fld id="{5BCAD085-E8A6-8845-BD4E-CB4CCA059FC4}" type="datetimeFigureOut">
               <a:rPr lang="en-US" smtClean="0"/>
-              <a:t>6/11/2026</a:t>
+              <a:t>6/12/2026</a:t>
             </a:fld>
             <a:endParaRPr lang="en-US"/>
           </a:p>
@@ -4846,7 +4846,7 @@
           <a:p>
             <a:fld id="{5BCAD085-E8A6-8845-BD4E-CB4CCA059FC4}" type="datetimeFigureOut">
               <a:rPr lang="en-US" smtClean="0"/>
-              <a:t>6/11/2026</a:t>
+              <a:t>6/12/2026</a:t>
             </a:fld>
             <a:endParaRPr lang="en-US"/>
           </a:p>
@@ -5091,7 +5091,7 @@
           <a:p>
             <a:fld id="{5BCAD085-E8A6-8845-BD4E-CB4CCA059FC4}" type="datetimeFigureOut">
               <a:rPr lang="en-US" smtClean="0"/>
-              <a:t>6/11/2026</a:t>
+              <a:t>6/12/2026</a:t>
             </a:fld>
             <a:endParaRPr lang="en-US"/>
           </a:p>
@@ -5376,7 +5376,7 @@
           <a:p>
             <a:fld id="{5BCAD085-E8A6-8845-BD4E-CB4CCA059FC4}" type="datetimeFigureOut">
               <a:rPr lang="en-US" smtClean="0"/>
-              <a:t>6/11/2026</a:t>
+              <a:t>6/12/2026</a:t>
             </a:fld>
             <a:endParaRPr lang="en-US"/>
           </a:p>
@@ -5795,7 +5795,7 @@
           <a:p>
             <a:fld id="{5BCAD085-E8A6-8845-BD4E-CB4CCA059FC4}" type="datetimeFigureOut">
               <a:rPr lang="en-US" smtClean="0"/>
-              <a:t>6/11/2026</a:t>
+              <a:t>6/12/2026</a:t>
             </a:fld>
             <a:endParaRPr lang="en-US"/>
           </a:p>
@@ -5912,7 +5912,7 @@
           <a:p>
             <a:fld id="{5BCAD085-E8A6-8845-BD4E-CB4CCA059FC4}" type="datetimeFigureOut">
               <a:rPr lang="en-US" smtClean="0"/>
-              <a:t>6/11/2026</a:t>
+              <a:t>6/12/2026</a:t>
             </a:fld>
             <a:endParaRPr lang="en-US"/>
           </a:p>
@@ -6007,7 +6007,7 @@
           <a:p>
             <a:fld id="{5BCAD085-E8A6-8845-BD4E-CB4CCA059FC4}" type="datetimeFigureOut">
               <a:rPr lang="en-US" smtClean="0"/>
-              <a:t>6/11/2026</a:t>
+              <a:t>6/12/2026</a:t>
             </a:fld>
             <a:endParaRPr lang="en-US"/>
           </a:p>
@@ -6282,7 +6282,7 @@
           <a:p>
             <a:fld id="{5BCAD085-E8A6-8845-BD4E-CB4CCA059FC4}" type="datetimeFigureOut">
               <a:rPr lang="en-US" smtClean="0"/>
-              <a:t>6/11/2026</a:t>
+              <a:t>6/12/2026</a:t>
             </a:fld>
             <a:endParaRPr lang="en-US"/>
           </a:p>
@@ -6534,7 +6534,7 @@
           <a:p>
             <a:fld id="{5BCAD085-E8A6-8845-BD4E-CB4CCA059FC4}" type="datetimeFigureOut">
               <a:rPr lang="en-US" smtClean="0"/>
-              <a:t>6/11/2026</a:t>
+              <a:t>6/12/2026</a:t>
             </a:fld>
             <a:endParaRPr lang="en-US"/>
           </a:p>
@@ -6745,7 +6745,7 @@
           <a:p>
             <a:fld id="{5BCAD085-E8A6-8845-BD4E-CB4CCA059FC4}" type="datetimeFigureOut">
               <a:rPr lang="en-US" smtClean="0"/>
-              <a:t>6/11/2026</a:t>
+              <a:t>6/12/2026</a:t>
             </a:fld>
             <a:endParaRPr lang="en-US"/>
           </a:p>
@@ -24659,7 +24659,7 @@
         <p:spPr>
           <a:xfrm>
             <a:off x="556260" y="1280160"/>
-            <a:ext cx="3359894" cy="184666"/>
+            <a:ext cx="4263988" cy="184666"/>
           </a:xfrm>
           <a:prstGeom prst="rect">
             <a:avLst/>
@@ -24677,17 +24677,17 @@
           <a:p>
             <a:pPr algn="l"/>
             <a:r>
-              <a:rPr lang="en-US" sz="1200" i="1" dirty="0">
+              <a:rPr lang="en-US" altLang="zh-CN" sz="1200" i="1" dirty="0">
                 <a:solidFill>
                   <a:srgbClr val="5B6470"/>
                 </a:solidFill>
                 <a:latin typeface="Arial"/>
                 <a:cs typeface="Arial"/>
               </a:rPr>
-              <a:t>More than 150 datasets covered align with </a:t>
+              <a:t>Board coverage across </a:t>
             </a:r>
             <a:r>
-              <a:rPr lang="en-US" sz="1200" i="1" dirty="0" err="1">
+              <a:rPr lang="en-US" altLang="zh-CN" sz="1200" i="1" dirty="0" err="1">
                 <a:solidFill>
                   <a:srgbClr val="5B6470"/>
                 </a:solidFill>
@@ -24697,15 +24697,22 @@
               <a:t>iData</a:t>
             </a:r>
             <a:r>
-              <a:rPr lang="en-US" sz="1200" i="1" dirty="0">
+              <a:rPr lang="en-US" altLang="zh-CN" sz="1200" i="1" dirty="0">
                 <a:solidFill>
                   <a:srgbClr val="5B6470"/>
                 </a:solidFill>
                 <a:latin typeface="Arial"/>
                 <a:cs typeface="Arial"/>
               </a:rPr>
-              <a:t>.</a:t>
+              <a:t> catalogs and adjacent sources.</a:t>
             </a:r>
+            <a:endParaRPr lang="en-US" sz="1200" i="1" dirty="0">
+              <a:solidFill>
+                <a:srgbClr val="5B6470"/>
+              </a:solidFill>
+              <a:latin typeface="Arial"/>
+              <a:cs typeface="Arial"/>
+            </a:endParaRPr>
           </a:p>
         </p:txBody>
       </p:sp>
@@ -24982,7 +24989,7 @@
                 <a:latin typeface="Arial"/>
                 <a:cs typeface="Arial"/>
               </a:rPr>
-              <a:t>BOP, CPI, GFS, MFS, EER, ER, IIP, FSI,</a:t>
+              <a:t>BOP, CPI, GFS, MFS, EER, ER, IIP, FSI</a:t>
             </a:r>
             <a:r>
               <a:rPr lang="en-US" dirty="0">
@@ -25057,7 +25064,7 @@
                 <a:latin typeface="Arial"/>
                 <a:cs typeface="Arial"/>
               </a:rPr>
-              <a:t> Selected, Haver daily / weekly / monthly databases , etc.</a:t>
+              <a:t> Selected, Haver daily / weekly / monthly databases, etc.</a:t>
             </a:r>
           </a:p>
         </p:txBody>
@@ -34433,7 +34440,7 @@
                     <a:ea typeface="Microsoft YaHei"/>
                     <a:cs typeface="Arial Black"/>
                   </a:rPr>
-                  <a:t>Routine</a:t>
+                  <a:t>Routing</a:t>
                 </a:r>
                 <a:endParaRPr lang="zh-CN" sz="2000" b="1" dirty="0">
                   <a:solidFill>
@@ -34528,7 +34535,7 @@
                     <a:ea typeface="Microsoft YaHei"/>
                     <a:cs typeface="Arial"/>
                   </a:rPr>
-                  <a:t>Past: Manul indicator lookup and code matching with </a:t>
+                  <a:t>Past: Manual indicator lookup and code matching with </a:t>
                 </a:r>
                 <a:r>
                   <a:rPr lang="zh-CN" sz="1000" dirty="0">

--- a/docs/decks/RA-Skills-Showcase.pptx
+++ b/docs/decks/RA-Skills-Showcase.pptx
@@ -24659,7 +24659,7 @@
         <p:spPr>
           <a:xfrm>
             <a:off x="556260" y="1280160"/>
-            <a:ext cx="4263988" cy="184666"/>
+            <a:ext cx="4220707" cy="184666"/>
           </a:xfrm>
           <a:prstGeom prst="rect">
             <a:avLst/>
@@ -24684,7 +24684,7 @@
                 <a:latin typeface="Arial"/>
                 <a:cs typeface="Arial"/>
               </a:rPr>
-              <a:t>Board coverage across </a:t>
+              <a:t>Broad coverage across </a:t>
             </a:r>
             <a:r>
               <a:rPr lang="en-US" altLang="zh-CN" sz="1200" i="1" dirty="0" err="1">
